--- a/chapter13/parts/part-09-rmarkdown-and-dvc/clip.pptx
+++ b/chapter13/parts/part-09-rmarkdown-and-dvc/clip.pptx
@@ -4255,10 +4255,12 @@
           </a:bodyPr>
           <a:lstStyle/>
           <a:p>
-            <a:pPr>
+            <a:pPr lvl="0" marL="457200" indent="-228600">
+              <a:buFont typeface="Calibri"/>
               <a:spcAft>
                 <a:spcPts val="1000"/>
               </a:spcAft>
+              <a:buSzPct val="100000"/>
               <a:buChar char="•"/>
               <a:lnSpc>
                 <a:spcPts val="2200"/>
@@ -4394,10 +4396,12 @@
           </a:bodyPr>
           <a:lstStyle/>
           <a:p>
-            <a:pPr>
+            <a:pPr lvl="0" marL="457200" indent="-228600">
+              <a:buFont typeface="Calibri"/>
               <a:spcAft>
                 <a:spcPts val="1000"/>
               </a:spcAft>
+              <a:buSzPct val="100000"/>
               <a:buChar char="•"/>
               <a:lnSpc>
                 <a:spcPts val="2200"/>
@@ -4414,10 +4418,12 @@
             </a:r>
           </a:p>
           <a:p>
-            <a:pPr>
+            <a:pPr lvl="0" marL="457200" indent="-228600">
+              <a:buFont typeface="Calibri"/>
               <a:spcAft>
                 <a:spcPts val="1000"/>
               </a:spcAft>
+              <a:buSzPct val="100000"/>
               <a:buChar char="•"/>
               <a:lnSpc>
                 <a:spcPts val="2200"/>
@@ -4434,10 +4440,12 @@
             </a:r>
           </a:p>
           <a:p>
-            <a:pPr>
+            <a:pPr lvl="0" marL="457200" indent="-228600">
+              <a:buFont typeface="Calibri"/>
               <a:spcAft>
                 <a:spcPts val="1000"/>
               </a:spcAft>
+              <a:buSzPct val="100000"/>
               <a:buChar char="•"/>
               <a:lnSpc>
                 <a:spcPts val="2200"/>
@@ -4454,10 +4462,12 @@
             </a:r>
           </a:p>
           <a:p>
-            <a:pPr>
+            <a:pPr lvl="0" marL="457200" indent="-228600">
+              <a:buFont typeface="Calibri"/>
               <a:spcAft>
                 <a:spcPts val="1000"/>
               </a:spcAft>
+              <a:buSzPct val="100000"/>
               <a:buChar char="•"/>
               <a:lnSpc>
                 <a:spcPts val="2200"/>
@@ -4593,10 +4603,12 @@
           </a:bodyPr>
           <a:lstStyle/>
           <a:p>
-            <a:pPr>
+            <a:pPr lvl="0" marL="457200" indent="-228600">
+              <a:buFont typeface="Calibri"/>
               <a:spcAft>
                 <a:spcPts val="1000"/>
               </a:spcAft>
+              <a:buSzPct val="100000"/>
               <a:buChar char="•"/>
               <a:lnSpc>
                 <a:spcPts val="2200"/>
@@ -4613,10 +4625,12 @@
             </a:r>
           </a:p>
           <a:p>
-            <a:pPr>
+            <a:pPr lvl="0" marL="457200" indent="-228600">
+              <a:buFont typeface="Calibri"/>
               <a:spcAft>
                 <a:spcPts val="1000"/>
               </a:spcAft>
+              <a:buSzPct val="100000"/>
               <a:buChar char="•"/>
               <a:lnSpc>
                 <a:spcPts val="2200"/>
@@ -4633,10 +4647,12 @@
             </a:r>
           </a:p>
           <a:p>
-            <a:pPr>
+            <a:pPr lvl="0" marL="457200" indent="-228600">
+              <a:buFont typeface="Calibri"/>
               <a:spcAft>
                 <a:spcPts val="1000"/>
               </a:spcAft>
+              <a:buSzPct val="100000"/>
               <a:buChar char="•"/>
               <a:lnSpc>
                 <a:spcPts val="2200"/>
@@ -4653,10 +4669,12 @@
             </a:r>
           </a:p>
           <a:p>
-            <a:pPr>
+            <a:pPr lvl="0" marL="457200" indent="-228600">
+              <a:buFont typeface="Calibri"/>
               <a:spcAft>
                 <a:spcPts val="1000"/>
               </a:spcAft>
+              <a:buSzPct val="100000"/>
               <a:buChar char="•"/>
               <a:lnSpc>
                 <a:spcPts val="2200"/>
@@ -4673,10 +4691,12 @@
             </a:r>
           </a:p>
           <a:p>
-            <a:pPr>
+            <a:pPr lvl="0" marL="457200" indent="-228600">
+              <a:buFont typeface="Calibri"/>
               <a:spcAft>
                 <a:spcPts val="1000"/>
               </a:spcAft>
+              <a:buSzPct val="100000"/>
               <a:buChar char="•"/>
               <a:lnSpc>
                 <a:spcPts val="2200"/>
@@ -4693,10 +4713,12 @@
             </a:r>
           </a:p>
           <a:p>
-            <a:pPr>
+            <a:pPr lvl="0" marL="457200" indent="-228600">
+              <a:buFont typeface="Calibri"/>
               <a:spcAft>
                 <a:spcPts val="1000"/>
               </a:spcAft>
+              <a:buSzPct val="100000"/>
               <a:buChar char="•"/>
               <a:lnSpc>
                 <a:spcPts val="2200"/>
@@ -4832,10 +4854,12 @@
           </a:bodyPr>
           <a:lstStyle/>
           <a:p>
-            <a:pPr>
+            <a:pPr lvl="0" marL="457200" indent="-228600">
+              <a:buFont typeface="Calibri"/>
               <a:spcAft>
                 <a:spcPts val="1000"/>
               </a:spcAft>
+              <a:buSzPct val="100000"/>
               <a:buChar char="•"/>
               <a:lnSpc>
                 <a:spcPts val="2200"/>
@@ -4852,10 +4876,12 @@
             </a:r>
           </a:p>
           <a:p>
-            <a:pPr>
+            <a:pPr lvl="0" marL="457200" indent="-228600">
+              <a:buFont typeface="Calibri"/>
               <a:spcAft>
                 <a:spcPts val="1000"/>
               </a:spcAft>
+              <a:buSzPct val="100000"/>
               <a:buChar char="•"/>
               <a:lnSpc>
                 <a:spcPts val="2200"/>
@@ -4872,10 +4898,12 @@
             </a:r>
           </a:p>
           <a:p>
-            <a:pPr>
+            <a:pPr lvl="0" marL="457200" indent="-228600">
+              <a:buFont typeface="Calibri"/>
               <a:spcAft>
                 <a:spcPts val="1000"/>
               </a:spcAft>
+              <a:buSzPct val="100000"/>
               <a:buChar char="•"/>
               <a:lnSpc>
                 <a:spcPts val="2200"/>
@@ -5011,10 +5039,12 @@
           </a:bodyPr>
           <a:lstStyle/>
           <a:p>
-            <a:pPr>
+            <a:pPr lvl="0" marL="457200" indent="-228600">
+              <a:buFont typeface="Calibri"/>
               <a:spcAft>
                 <a:spcPts val="1000"/>
               </a:spcAft>
+              <a:buSzPct val="100000"/>
               <a:buChar char="•"/>
               <a:lnSpc>
                 <a:spcPts val="2200"/>
@@ -5031,10 +5061,12 @@
             </a:r>
           </a:p>
           <a:p>
-            <a:pPr>
+            <a:pPr lvl="0" marL="457200" indent="-228600">
+              <a:buFont typeface="Calibri"/>
               <a:spcAft>
                 <a:spcPts val="1000"/>
               </a:spcAft>
+              <a:buSzPct val="100000"/>
               <a:buChar char="•"/>
               <a:lnSpc>
                 <a:spcPts val="2200"/>
@@ -5051,10 +5083,12 @@
             </a:r>
           </a:p>
           <a:p>
-            <a:pPr>
+            <a:pPr lvl="0" marL="457200" indent="-228600">
+              <a:buFont typeface="Calibri"/>
               <a:spcAft>
                 <a:spcPts val="1000"/>
               </a:spcAft>
+              <a:buSzPct val="100000"/>
               <a:buChar char="•"/>
               <a:lnSpc>
                 <a:spcPts val="2200"/>
@@ -5071,10 +5105,12 @@
             </a:r>
           </a:p>
           <a:p>
-            <a:pPr>
+            <a:pPr lvl="0" marL="457200" indent="-228600">
+              <a:buFont typeface="Calibri"/>
               <a:spcAft>
                 <a:spcPts val="1000"/>
               </a:spcAft>
+              <a:buSzPct val="100000"/>
               <a:buChar char="•"/>
               <a:lnSpc>
                 <a:spcPts val="2200"/>
@@ -5091,10 +5127,12 @@
             </a:r>
           </a:p>
           <a:p>
-            <a:pPr>
+            <a:pPr lvl="0" marL="457200" indent="-228600">
+              <a:buFont typeface="Calibri"/>
               <a:spcAft>
                 <a:spcPts val="1000"/>
               </a:spcAft>
+              <a:buSzPct val="100000"/>
               <a:buChar char="•"/>
               <a:lnSpc>
                 <a:spcPts val="2200"/>
@@ -5111,10 +5149,12 @@
             </a:r>
           </a:p>
           <a:p>
-            <a:pPr>
+            <a:pPr lvl="0" marL="457200" indent="-228600">
+              <a:buFont typeface="Calibri"/>
               <a:spcAft>
                 <a:spcPts val="1000"/>
               </a:spcAft>
+              <a:buSzPct val="100000"/>
               <a:buChar char="•"/>
               <a:lnSpc>
                 <a:spcPts val="2200"/>
@@ -5250,10 +5290,12 @@
           </a:bodyPr>
           <a:lstStyle/>
           <a:p>
-            <a:pPr>
+            <a:pPr lvl="0" marL="457200" indent="-228600">
+              <a:buFont typeface="Calibri"/>
               <a:spcAft>
                 <a:spcPts val="1000"/>
               </a:spcAft>
+              <a:buSzPct val="100000"/>
               <a:buChar char="•"/>
               <a:lnSpc>
                 <a:spcPts val="2200"/>
@@ -5270,10 +5312,12 @@
             </a:r>
           </a:p>
           <a:p>
-            <a:pPr>
+            <a:pPr lvl="0" marL="457200" indent="-228600">
+              <a:buFont typeface="Calibri"/>
               <a:spcAft>
                 <a:spcPts val="1000"/>
               </a:spcAft>
+              <a:buSzPct val="100000"/>
               <a:buChar char="•"/>
               <a:lnSpc>
                 <a:spcPts val="2200"/>
@@ -5290,10 +5334,12 @@
             </a:r>
           </a:p>
           <a:p>
-            <a:pPr>
+            <a:pPr lvl="0" marL="457200" indent="-228600">
+              <a:buFont typeface="Calibri"/>
               <a:spcAft>
                 <a:spcPts val="1000"/>
               </a:spcAft>
+              <a:buSzPct val="100000"/>
               <a:buChar char="•"/>
               <a:lnSpc>
                 <a:spcPts val="2200"/>
@@ -5310,10 +5356,12 @@
             </a:r>
           </a:p>
           <a:p>
-            <a:pPr>
+            <a:pPr lvl="0" marL="457200" indent="-228600">
+              <a:buFont typeface="Calibri"/>
               <a:spcAft>
                 <a:spcPts val="1000"/>
               </a:spcAft>
+              <a:buSzPct val="100000"/>
               <a:buChar char="•"/>
               <a:lnSpc>
                 <a:spcPts val="2200"/>
@@ -5330,10 +5378,12 @@
             </a:r>
           </a:p>
           <a:p>
-            <a:pPr>
+            <a:pPr lvl="0" marL="457200" indent="-228600">
+              <a:buFont typeface="Calibri"/>
               <a:spcAft>
                 <a:spcPts val="1000"/>
               </a:spcAft>
+              <a:buSzPct val="100000"/>
               <a:buChar char="•"/>
               <a:lnSpc>
                 <a:spcPts val="2200"/>
@@ -5350,10 +5400,12 @@
             </a:r>
           </a:p>
           <a:p>
-            <a:pPr>
+            <a:pPr lvl="0" marL="457200" indent="-228600">
+              <a:buFont typeface="Calibri"/>
               <a:spcAft>
                 <a:spcPts val="1000"/>
               </a:spcAft>
+              <a:buSzPct val="100000"/>
               <a:buChar char="•"/>
               <a:lnSpc>
                 <a:spcPts val="2200"/>
@@ -5489,10 +5541,12 @@
           </a:bodyPr>
           <a:lstStyle/>
           <a:p>
-            <a:pPr>
+            <a:pPr lvl="0" marL="457200" indent="-228600">
+              <a:buFont typeface="Calibri"/>
               <a:spcAft>
                 <a:spcPts val="1000"/>
               </a:spcAft>
+              <a:buSzPct val="100000"/>
               <a:buChar char="•"/>
               <a:lnSpc>
                 <a:spcPts val="2200"/>
@@ -5509,10 +5563,12 @@
             </a:r>
           </a:p>
           <a:p>
-            <a:pPr>
+            <a:pPr lvl="0" marL="457200" indent="-228600">
+              <a:buFont typeface="Calibri"/>
               <a:spcAft>
                 <a:spcPts val="1000"/>
               </a:spcAft>
+              <a:buSzPct val="100000"/>
               <a:buChar char="•"/>
               <a:lnSpc>
                 <a:spcPts val="2200"/>
@@ -5529,10 +5585,12 @@
             </a:r>
           </a:p>
           <a:p>
-            <a:pPr>
+            <a:pPr lvl="0" marL="457200" indent="-228600">
+              <a:buFont typeface="Calibri"/>
               <a:spcAft>
                 <a:spcPts val="1000"/>
               </a:spcAft>
+              <a:buSzPct val="100000"/>
               <a:buChar char="•"/>
               <a:lnSpc>
                 <a:spcPts val="2200"/>
@@ -5549,10 +5607,12 @@
             </a:r>
           </a:p>
           <a:p>
-            <a:pPr>
+            <a:pPr lvl="0" marL="457200" indent="-228600">
+              <a:buFont typeface="Calibri"/>
               <a:spcAft>
                 <a:spcPts val="1000"/>
               </a:spcAft>
+              <a:buSzPct val="100000"/>
               <a:buChar char="•"/>
               <a:lnSpc>
                 <a:spcPts val="2200"/>
@@ -5688,10 +5748,12 @@
           </a:bodyPr>
           <a:lstStyle/>
           <a:p>
-            <a:pPr>
+            <a:pPr lvl="0" marL="457200" indent="-228600">
+              <a:buFont typeface="Calibri"/>
               <a:spcAft>
                 <a:spcPts val="1000"/>
               </a:spcAft>
+              <a:buSzPct val="100000"/>
               <a:buChar char="•"/>
               <a:lnSpc>
                 <a:spcPts val="2200"/>
@@ -5708,10 +5770,12 @@
             </a:r>
           </a:p>
           <a:p>
-            <a:pPr>
+            <a:pPr lvl="0" marL="457200" indent="-228600">
+              <a:buFont typeface="Calibri"/>
               <a:spcAft>
                 <a:spcPts val="1000"/>
               </a:spcAft>
+              <a:buSzPct val="100000"/>
               <a:buChar char="•"/>
               <a:lnSpc>
                 <a:spcPts val="2200"/>
